--- a/docs/07-DP후보안/DP03-MAF-LLM-배치-PoC결과.pptx
+++ b/docs/07-DP후보안/DP03-MAF-LLM-배치-PoC결과.pptx
@@ -129,7 +129,7 @@
           <p:cNvPr id="2" name="제목 1">
             <a:extLst>
               <a:ext uri="{FF2B5EF4-FFF2-40B4-BE49-F238E27FC236}">
-                <a16:creationId xmlns:a16="http://schemas.microsoft.com/office/drawing/2014/main" id="{C1E61C3C-FF7A-D037-2A1F-0AEC6AFC108A}"/>
+                <a16:creationId xmlns:a16="http://schemas.microsoft.com/office/drawing/2014/main" id="{9C689C91-7837-BE70-4E87-A7353A1656B9}"/>
               </a:ext>
             </a:extLst>
           </p:cNvPr>
@@ -166,7 +166,7 @@
           <p:cNvPr id="3" name="부제목 2">
             <a:extLst>
               <a:ext uri="{FF2B5EF4-FFF2-40B4-BE49-F238E27FC236}">
-                <a16:creationId xmlns:a16="http://schemas.microsoft.com/office/drawing/2014/main" id="{79A36227-32B2-0F3E-EC0B-C3E4FB903301}"/>
+                <a16:creationId xmlns:a16="http://schemas.microsoft.com/office/drawing/2014/main" id="{5403D693-93B6-37DE-81DD-40F15136B6B6}"/>
               </a:ext>
             </a:extLst>
           </p:cNvPr>
@@ -236,7 +236,7 @@
           <p:cNvPr id="4" name="날짜 개체 틀 3">
             <a:extLst>
               <a:ext uri="{FF2B5EF4-FFF2-40B4-BE49-F238E27FC236}">
-                <a16:creationId xmlns:a16="http://schemas.microsoft.com/office/drawing/2014/main" id="{93B4D533-6195-C813-C2AF-62D07F6EE96E}"/>
+                <a16:creationId xmlns:a16="http://schemas.microsoft.com/office/drawing/2014/main" id="{A10A2C41-E1D6-5511-EE07-C6CFB3852D45}"/>
               </a:ext>
             </a:extLst>
           </p:cNvPr>
@@ -252,7 +252,7 @@
           <a:bodyPr/>
           <a:lstStyle/>
           <a:p>
-            <a:fld id="{604A3960-FD57-49B9-A34E-DAF05E1A9655}" type="datetimeFigureOut">
+            <a:fld id="{1C3EDC87-7F81-476D-B1B4-92845AA6C67D}" type="datetimeFigureOut">
               <a:rPr lang="ko-KR" altLang="en-US" smtClean="0"/>
               <a:t>2026-06-26</a:t>
             </a:fld>
@@ -265,7 +265,7 @@
           <p:cNvPr id="5" name="바닥글 개체 틀 4">
             <a:extLst>
               <a:ext uri="{FF2B5EF4-FFF2-40B4-BE49-F238E27FC236}">
-                <a16:creationId xmlns:a16="http://schemas.microsoft.com/office/drawing/2014/main" id="{17E548E4-58C3-F16F-B818-C152021E5B89}"/>
+                <a16:creationId xmlns:a16="http://schemas.microsoft.com/office/drawing/2014/main" id="{8FC42583-4944-4617-B4FB-4FA58A07EA90}"/>
               </a:ext>
             </a:extLst>
           </p:cNvPr>
@@ -290,7 +290,7 @@
           <p:cNvPr id="6" name="슬라이드 번호 개체 틀 5">
             <a:extLst>
               <a:ext uri="{FF2B5EF4-FFF2-40B4-BE49-F238E27FC236}">
-                <a16:creationId xmlns:a16="http://schemas.microsoft.com/office/drawing/2014/main" id="{0544D153-7F9A-0854-4FBB-A4BD9F2BB13D}"/>
+                <a16:creationId xmlns:a16="http://schemas.microsoft.com/office/drawing/2014/main" id="{F2600F7C-AFB5-2543-F09A-0209F05B4408}"/>
               </a:ext>
             </a:extLst>
           </p:cNvPr>
@@ -306,7 +306,7 @@
           <a:bodyPr/>
           <a:lstStyle/>
           <a:p>
-            <a:fld id="{E324F0D5-952A-40FC-82E6-C1B079B3D970}" type="slidenum">
+            <a:fld id="{C63C1638-AE85-4F87-8B18-1FB7979D06F4}" type="slidenum">
               <a:rPr lang="ko-KR" altLang="en-US" smtClean="0"/>
               <a:t>‹#›</a:t>
             </a:fld>
@@ -317,7 +317,7 @@
     </p:spTree>
     <p:extLst>
       <p:ext uri="{BB962C8B-B14F-4D97-AF65-F5344CB8AC3E}">
-        <p14:creationId xmlns:p14="http://schemas.microsoft.com/office/powerpoint/2010/main" val="3899749154"/>
+        <p14:creationId xmlns:p14="http://schemas.microsoft.com/office/powerpoint/2010/main" val="415173291"/>
       </p:ext>
     </p:extLst>
   </p:cSld>
@@ -349,7 +349,7 @@
           <p:cNvPr id="2" name="제목 1">
             <a:extLst>
               <a:ext uri="{FF2B5EF4-FFF2-40B4-BE49-F238E27FC236}">
-                <a16:creationId xmlns:a16="http://schemas.microsoft.com/office/drawing/2014/main" id="{82A14543-87EF-1F80-5043-507C722F105A}"/>
+                <a16:creationId xmlns:a16="http://schemas.microsoft.com/office/drawing/2014/main" id="{1ACCE084-B895-5473-5B72-E9B3E18A121B}"/>
               </a:ext>
             </a:extLst>
           </p:cNvPr>
@@ -377,7 +377,7 @@
           <p:cNvPr id="3" name="세로 텍스트 개체 틀 2">
             <a:extLst>
               <a:ext uri="{FF2B5EF4-FFF2-40B4-BE49-F238E27FC236}">
-                <a16:creationId xmlns:a16="http://schemas.microsoft.com/office/drawing/2014/main" id="{64443DC9-FBE3-602C-4235-368E62E29896}"/>
+                <a16:creationId xmlns:a16="http://schemas.microsoft.com/office/drawing/2014/main" id="{FEC6385E-E21A-0E4B-55FE-71CBCA92D735}"/>
               </a:ext>
             </a:extLst>
           </p:cNvPr>
@@ -434,7 +434,7 @@
           <p:cNvPr id="4" name="날짜 개체 틀 3">
             <a:extLst>
               <a:ext uri="{FF2B5EF4-FFF2-40B4-BE49-F238E27FC236}">
-                <a16:creationId xmlns:a16="http://schemas.microsoft.com/office/drawing/2014/main" id="{1EE06B36-4D70-D2E9-C193-565A708D899D}"/>
+                <a16:creationId xmlns:a16="http://schemas.microsoft.com/office/drawing/2014/main" id="{1FD443EF-D26A-3C2D-74C4-982453A6471B}"/>
               </a:ext>
             </a:extLst>
           </p:cNvPr>
@@ -450,7 +450,7 @@
           <a:bodyPr/>
           <a:lstStyle/>
           <a:p>
-            <a:fld id="{604A3960-FD57-49B9-A34E-DAF05E1A9655}" type="datetimeFigureOut">
+            <a:fld id="{1C3EDC87-7F81-476D-B1B4-92845AA6C67D}" type="datetimeFigureOut">
               <a:rPr lang="ko-KR" altLang="en-US" smtClean="0"/>
               <a:t>2026-06-26</a:t>
             </a:fld>
@@ -463,7 +463,7 @@
           <p:cNvPr id="5" name="바닥글 개체 틀 4">
             <a:extLst>
               <a:ext uri="{FF2B5EF4-FFF2-40B4-BE49-F238E27FC236}">
-                <a16:creationId xmlns:a16="http://schemas.microsoft.com/office/drawing/2014/main" id="{17E86F9F-E8F8-91B0-7AC1-508B8A8DBCC7}"/>
+                <a16:creationId xmlns:a16="http://schemas.microsoft.com/office/drawing/2014/main" id="{7D4FE76A-A704-045F-4384-28D10A13DC10}"/>
               </a:ext>
             </a:extLst>
           </p:cNvPr>
@@ -488,7 +488,7 @@
           <p:cNvPr id="6" name="슬라이드 번호 개체 틀 5">
             <a:extLst>
               <a:ext uri="{FF2B5EF4-FFF2-40B4-BE49-F238E27FC236}">
-                <a16:creationId xmlns:a16="http://schemas.microsoft.com/office/drawing/2014/main" id="{6A461548-1267-04D7-9556-DAD4E7906954}"/>
+                <a16:creationId xmlns:a16="http://schemas.microsoft.com/office/drawing/2014/main" id="{8BE35009-737C-F816-5B64-F36132432E05}"/>
               </a:ext>
             </a:extLst>
           </p:cNvPr>
@@ -504,7 +504,7 @@
           <a:bodyPr/>
           <a:lstStyle/>
           <a:p>
-            <a:fld id="{E324F0D5-952A-40FC-82E6-C1B079B3D970}" type="slidenum">
+            <a:fld id="{C63C1638-AE85-4F87-8B18-1FB7979D06F4}" type="slidenum">
               <a:rPr lang="ko-KR" altLang="en-US" smtClean="0"/>
               <a:t>‹#›</a:t>
             </a:fld>
@@ -515,7 +515,7 @@
     </p:spTree>
     <p:extLst>
       <p:ext uri="{BB962C8B-B14F-4D97-AF65-F5344CB8AC3E}">
-        <p14:creationId xmlns:p14="http://schemas.microsoft.com/office/powerpoint/2010/main" val="1893931438"/>
+        <p14:creationId xmlns:p14="http://schemas.microsoft.com/office/powerpoint/2010/main" val="3270557618"/>
       </p:ext>
     </p:extLst>
   </p:cSld>
@@ -547,7 +547,7 @@
           <p:cNvPr id="2" name="세로 제목 1">
             <a:extLst>
               <a:ext uri="{FF2B5EF4-FFF2-40B4-BE49-F238E27FC236}">
-                <a16:creationId xmlns:a16="http://schemas.microsoft.com/office/drawing/2014/main" id="{684F35BF-BCA2-D6D2-6588-D8AD67F9851E}"/>
+                <a16:creationId xmlns:a16="http://schemas.microsoft.com/office/drawing/2014/main" id="{732409FA-40F5-4A55-0032-6DF31249D51C}"/>
               </a:ext>
             </a:extLst>
           </p:cNvPr>
@@ -580,7 +580,7 @@
           <p:cNvPr id="3" name="세로 텍스트 개체 틀 2">
             <a:extLst>
               <a:ext uri="{FF2B5EF4-FFF2-40B4-BE49-F238E27FC236}">
-                <a16:creationId xmlns:a16="http://schemas.microsoft.com/office/drawing/2014/main" id="{86F039AE-BD4A-DCD1-BCE2-B5D36DD378F4}"/>
+                <a16:creationId xmlns:a16="http://schemas.microsoft.com/office/drawing/2014/main" id="{5D8EBAC5-8861-6C25-487E-DC16538CE03E}"/>
               </a:ext>
             </a:extLst>
           </p:cNvPr>
@@ -642,7 +642,7 @@
           <p:cNvPr id="4" name="날짜 개체 틀 3">
             <a:extLst>
               <a:ext uri="{FF2B5EF4-FFF2-40B4-BE49-F238E27FC236}">
-                <a16:creationId xmlns:a16="http://schemas.microsoft.com/office/drawing/2014/main" id="{8740A794-C696-ECF9-A9E6-65A84F21A98F}"/>
+                <a16:creationId xmlns:a16="http://schemas.microsoft.com/office/drawing/2014/main" id="{9AB4ACC3-D786-0951-47EF-DA5FE5893F99}"/>
               </a:ext>
             </a:extLst>
           </p:cNvPr>
@@ -658,7 +658,7 @@
           <a:bodyPr/>
           <a:lstStyle/>
           <a:p>
-            <a:fld id="{604A3960-FD57-49B9-A34E-DAF05E1A9655}" type="datetimeFigureOut">
+            <a:fld id="{1C3EDC87-7F81-476D-B1B4-92845AA6C67D}" type="datetimeFigureOut">
               <a:rPr lang="ko-KR" altLang="en-US" smtClean="0"/>
               <a:t>2026-06-26</a:t>
             </a:fld>
@@ -671,7 +671,7 @@
           <p:cNvPr id="5" name="바닥글 개체 틀 4">
             <a:extLst>
               <a:ext uri="{FF2B5EF4-FFF2-40B4-BE49-F238E27FC236}">
-                <a16:creationId xmlns:a16="http://schemas.microsoft.com/office/drawing/2014/main" id="{5A193B94-8934-0A90-D041-E83BA5A9BB49}"/>
+                <a16:creationId xmlns:a16="http://schemas.microsoft.com/office/drawing/2014/main" id="{189DFC34-D765-5771-08CE-DF533DFE9B5F}"/>
               </a:ext>
             </a:extLst>
           </p:cNvPr>
@@ -696,7 +696,7 @@
           <p:cNvPr id="6" name="슬라이드 번호 개체 틀 5">
             <a:extLst>
               <a:ext uri="{FF2B5EF4-FFF2-40B4-BE49-F238E27FC236}">
-                <a16:creationId xmlns:a16="http://schemas.microsoft.com/office/drawing/2014/main" id="{EA104D0C-86AA-A5EB-579C-E7DB8C6F8310}"/>
+                <a16:creationId xmlns:a16="http://schemas.microsoft.com/office/drawing/2014/main" id="{1CCF7D2C-C8F0-68E6-2FA0-E67F3BF1098A}"/>
               </a:ext>
             </a:extLst>
           </p:cNvPr>
@@ -712,7 +712,7 @@
           <a:bodyPr/>
           <a:lstStyle/>
           <a:p>
-            <a:fld id="{E324F0D5-952A-40FC-82E6-C1B079B3D970}" type="slidenum">
+            <a:fld id="{C63C1638-AE85-4F87-8B18-1FB7979D06F4}" type="slidenum">
               <a:rPr lang="ko-KR" altLang="en-US" smtClean="0"/>
               <a:t>‹#›</a:t>
             </a:fld>
@@ -723,7 +723,7 @@
     </p:spTree>
     <p:extLst>
       <p:ext uri="{BB962C8B-B14F-4D97-AF65-F5344CB8AC3E}">
-        <p14:creationId xmlns:p14="http://schemas.microsoft.com/office/powerpoint/2010/main" val="4156847147"/>
+        <p14:creationId xmlns:p14="http://schemas.microsoft.com/office/powerpoint/2010/main" val="1461322986"/>
       </p:ext>
     </p:extLst>
   </p:cSld>
@@ -755,7 +755,7 @@
           <p:cNvPr id="2" name="제목 1">
             <a:extLst>
               <a:ext uri="{FF2B5EF4-FFF2-40B4-BE49-F238E27FC236}">
-                <a16:creationId xmlns:a16="http://schemas.microsoft.com/office/drawing/2014/main" id="{DEB61B9D-EFEC-295D-3D5E-6498388F1539}"/>
+                <a16:creationId xmlns:a16="http://schemas.microsoft.com/office/drawing/2014/main" id="{2F32BADE-69C1-066B-BCD8-0A9E09ABD44E}"/>
               </a:ext>
             </a:extLst>
           </p:cNvPr>
@@ -783,7 +783,7 @@
           <p:cNvPr id="3" name="내용 개체 틀 2">
             <a:extLst>
               <a:ext uri="{FF2B5EF4-FFF2-40B4-BE49-F238E27FC236}">
-                <a16:creationId xmlns:a16="http://schemas.microsoft.com/office/drawing/2014/main" id="{84B3D6F7-67D5-DCE6-A1D3-CE00E818D869}"/>
+                <a16:creationId xmlns:a16="http://schemas.microsoft.com/office/drawing/2014/main" id="{A2FB0EB3-B856-84B1-BAED-8CB5E60407AA}"/>
               </a:ext>
             </a:extLst>
           </p:cNvPr>
@@ -840,7 +840,7 @@
           <p:cNvPr id="4" name="날짜 개체 틀 3">
             <a:extLst>
               <a:ext uri="{FF2B5EF4-FFF2-40B4-BE49-F238E27FC236}">
-                <a16:creationId xmlns:a16="http://schemas.microsoft.com/office/drawing/2014/main" id="{51E9492A-4E5F-5EF9-8D43-2B902A7F3B23}"/>
+                <a16:creationId xmlns:a16="http://schemas.microsoft.com/office/drawing/2014/main" id="{0E6069CD-F3C4-3A21-7E6D-69CAAC3DE284}"/>
               </a:ext>
             </a:extLst>
           </p:cNvPr>
@@ -856,7 +856,7 @@
           <a:bodyPr/>
           <a:lstStyle/>
           <a:p>
-            <a:fld id="{604A3960-FD57-49B9-A34E-DAF05E1A9655}" type="datetimeFigureOut">
+            <a:fld id="{1C3EDC87-7F81-476D-B1B4-92845AA6C67D}" type="datetimeFigureOut">
               <a:rPr lang="ko-KR" altLang="en-US" smtClean="0"/>
               <a:t>2026-06-26</a:t>
             </a:fld>
@@ -869,7 +869,7 @@
           <p:cNvPr id="5" name="바닥글 개체 틀 4">
             <a:extLst>
               <a:ext uri="{FF2B5EF4-FFF2-40B4-BE49-F238E27FC236}">
-                <a16:creationId xmlns:a16="http://schemas.microsoft.com/office/drawing/2014/main" id="{AAF77885-FCB2-E19F-DE56-1D828F95EE30}"/>
+                <a16:creationId xmlns:a16="http://schemas.microsoft.com/office/drawing/2014/main" id="{4832CF8F-266B-9538-2D10-2A6CA620600B}"/>
               </a:ext>
             </a:extLst>
           </p:cNvPr>
@@ -894,7 +894,7 @@
           <p:cNvPr id="6" name="슬라이드 번호 개체 틀 5">
             <a:extLst>
               <a:ext uri="{FF2B5EF4-FFF2-40B4-BE49-F238E27FC236}">
-                <a16:creationId xmlns:a16="http://schemas.microsoft.com/office/drawing/2014/main" id="{C10F6038-111F-AC77-368C-2A39E0C88C39}"/>
+                <a16:creationId xmlns:a16="http://schemas.microsoft.com/office/drawing/2014/main" id="{AFB4B173-906E-0D67-746D-8A31CDE2F975}"/>
               </a:ext>
             </a:extLst>
           </p:cNvPr>
@@ -910,7 +910,7 @@
           <a:bodyPr/>
           <a:lstStyle/>
           <a:p>
-            <a:fld id="{E324F0D5-952A-40FC-82E6-C1B079B3D970}" type="slidenum">
+            <a:fld id="{C63C1638-AE85-4F87-8B18-1FB7979D06F4}" type="slidenum">
               <a:rPr lang="ko-KR" altLang="en-US" smtClean="0"/>
               <a:t>‹#›</a:t>
             </a:fld>
@@ -921,7 +921,7 @@
     </p:spTree>
     <p:extLst>
       <p:ext uri="{BB962C8B-B14F-4D97-AF65-F5344CB8AC3E}">
-        <p14:creationId xmlns:p14="http://schemas.microsoft.com/office/powerpoint/2010/main" val="1543899326"/>
+        <p14:creationId xmlns:p14="http://schemas.microsoft.com/office/powerpoint/2010/main" val="242298894"/>
       </p:ext>
     </p:extLst>
   </p:cSld>
@@ -953,7 +953,7 @@
           <p:cNvPr id="2" name="제목 1">
             <a:extLst>
               <a:ext uri="{FF2B5EF4-FFF2-40B4-BE49-F238E27FC236}">
-                <a16:creationId xmlns:a16="http://schemas.microsoft.com/office/drawing/2014/main" id="{DF0C93C2-A189-2631-C1CC-B7B936737810}"/>
+                <a16:creationId xmlns:a16="http://schemas.microsoft.com/office/drawing/2014/main" id="{C69F9AB0-1F41-1C34-3B62-17E18F28826A}"/>
               </a:ext>
             </a:extLst>
           </p:cNvPr>
@@ -990,7 +990,7 @@
           <p:cNvPr id="3" name="텍스트 개체 틀 2">
             <a:extLst>
               <a:ext uri="{FF2B5EF4-FFF2-40B4-BE49-F238E27FC236}">
-                <a16:creationId xmlns:a16="http://schemas.microsoft.com/office/drawing/2014/main" id="{FDCE7B97-D5BE-310B-0813-2634DFAF90F7}"/>
+                <a16:creationId xmlns:a16="http://schemas.microsoft.com/office/drawing/2014/main" id="{3A5DA383-350B-FCCC-CFF8-C3BCE31630D1}"/>
               </a:ext>
             </a:extLst>
           </p:cNvPr>
@@ -1115,7 +1115,7 @@
           <p:cNvPr id="4" name="날짜 개체 틀 3">
             <a:extLst>
               <a:ext uri="{FF2B5EF4-FFF2-40B4-BE49-F238E27FC236}">
-                <a16:creationId xmlns:a16="http://schemas.microsoft.com/office/drawing/2014/main" id="{CE11304B-0DD1-7CC9-C2A2-FE2722AC89DE}"/>
+                <a16:creationId xmlns:a16="http://schemas.microsoft.com/office/drawing/2014/main" id="{077D746F-37E2-4947-B14E-553661520214}"/>
               </a:ext>
             </a:extLst>
           </p:cNvPr>
@@ -1131,7 +1131,7 @@
           <a:bodyPr/>
           <a:lstStyle/>
           <a:p>
-            <a:fld id="{604A3960-FD57-49B9-A34E-DAF05E1A9655}" type="datetimeFigureOut">
+            <a:fld id="{1C3EDC87-7F81-476D-B1B4-92845AA6C67D}" type="datetimeFigureOut">
               <a:rPr lang="ko-KR" altLang="en-US" smtClean="0"/>
               <a:t>2026-06-26</a:t>
             </a:fld>
@@ -1144,7 +1144,7 @@
           <p:cNvPr id="5" name="바닥글 개체 틀 4">
             <a:extLst>
               <a:ext uri="{FF2B5EF4-FFF2-40B4-BE49-F238E27FC236}">
-                <a16:creationId xmlns:a16="http://schemas.microsoft.com/office/drawing/2014/main" id="{9EB81CF5-82C1-F875-F0BC-42976AC1B666}"/>
+                <a16:creationId xmlns:a16="http://schemas.microsoft.com/office/drawing/2014/main" id="{DC8F3B75-8F90-96DC-7C6B-35954A2A31D3}"/>
               </a:ext>
             </a:extLst>
           </p:cNvPr>
@@ -1169,7 +1169,7 @@
           <p:cNvPr id="6" name="슬라이드 번호 개체 틀 5">
             <a:extLst>
               <a:ext uri="{FF2B5EF4-FFF2-40B4-BE49-F238E27FC236}">
-                <a16:creationId xmlns:a16="http://schemas.microsoft.com/office/drawing/2014/main" id="{9FFF2362-54E2-2242-9FCA-0A62358B6DB1}"/>
+                <a16:creationId xmlns:a16="http://schemas.microsoft.com/office/drawing/2014/main" id="{C7A827DB-AC1B-3969-5BE6-ADC7892694E9}"/>
               </a:ext>
             </a:extLst>
           </p:cNvPr>
@@ -1185,7 +1185,7 @@
           <a:bodyPr/>
           <a:lstStyle/>
           <a:p>
-            <a:fld id="{E324F0D5-952A-40FC-82E6-C1B079B3D970}" type="slidenum">
+            <a:fld id="{C63C1638-AE85-4F87-8B18-1FB7979D06F4}" type="slidenum">
               <a:rPr lang="ko-KR" altLang="en-US" smtClean="0"/>
               <a:t>‹#›</a:t>
             </a:fld>
@@ -1196,7 +1196,7 @@
     </p:spTree>
     <p:extLst>
       <p:ext uri="{BB962C8B-B14F-4D97-AF65-F5344CB8AC3E}">
-        <p14:creationId xmlns:p14="http://schemas.microsoft.com/office/powerpoint/2010/main" val="435356258"/>
+        <p14:creationId xmlns:p14="http://schemas.microsoft.com/office/powerpoint/2010/main" val="2420970166"/>
       </p:ext>
     </p:extLst>
   </p:cSld>
@@ -1228,7 +1228,7 @@
           <p:cNvPr id="2" name="제목 1">
             <a:extLst>
               <a:ext uri="{FF2B5EF4-FFF2-40B4-BE49-F238E27FC236}">
-                <a16:creationId xmlns:a16="http://schemas.microsoft.com/office/drawing/2014/main" id="{AF45809E-C10E-5F83-BB5B-43CDDA5B29ED}"/>
+                <a16:creationId xmlns:a16="http://schemas.microsoft.com/office/drawing/2014/main" id="{9EDBCFE3-1FB4-AA2B-F39E-88792E408961}"/>
               </a:ext>
             </a:extLst>
           </p:cNvPr>
@@ -1256,7 +1256,7 @@
           <p:cNvPr id="3" name="내용 개체 틀 2">
             <a:extLst>
               <a:ext uri="{FF2B5EF4-FFF2-40B4-BE49-F238E27FC236}">
-                <a16:creationId xmlns:a16="http://schemas.microsoft.com/office/drawing/2014/main" id="{3CE28B8D-CB8E-434E-E8D9-EB5193B9E2DA}"/>
+                <a16:creationId xmlns:a16="http://schemas.microsoft.com/office/drawing/2014/main" id="{A34C9690-FA65-DB24-7AA2-3F016318DF93}"/>
               </a:ext>
             </a:extLst>
           </p:cNvPr>
@@ -1318,7 +1318,7 @@
           <p:cNvPr id="4" name="내용 개체 틀 3">
             <a:extLst>
               <a:ext uri="{FF2B5EF4-FFF2-40B4-BE49-F238E27FC236}">
-                <a16:creationId xmlns:a16="http://schemas.microsoft.com/office/drawing/2014/main" id="{22314F44-0928-900D-EFD6-2CD4E4ACD1D9}"/>
+                <a16:creationId xmlns:a16="http://schemas.microsoft.com/office/drawing/2014/main" id="{9E08F4CE-A735-B81A-40BF-E844395AF917}"/>
               </a:ext>
             </a:extLst>
           </p:cNvPr>
@@ -1380,7 +1380,7 @@
           <p:cNvPr id="5" name="날짜 개체 틀 4">
             <a:extLst>
               <a:ext uri="{FF2B5EF4-FFF2-40B4-BE49-F238E27FC236}">
-                <a16:creationId xmlns:a16="http://schemas.microsoft.com/office/drawing/2014/main" id="{8E8F8593-770F-79C0-3DC1-A257C5DF43BE}"/>
+                <a16:creationId xmlns:a16="http://schemas.microsoft.com/office/drawing/2014/main" id="{912F8B6A-984E-77AD-04B9-C8E86321F163}"/>
               </a:ext>
             </a:extLst>
           </p:cNvPr>
@@ -1396,7 +1396,7 @@
           <a:bodyPr/>
           <a:lstStyle/>
           <a:p>
-            <a:fld id="{604A3960-FD57-49B9-A34E-DAF05E1A9655}" type="datetimeFigureOut">
+            <a:fld id="{1C3EDC87-7F81-476D-B1B4-92845AA6C67D}" type="datetimeFigureOut">
               <a:rPr lang="ko-KR" altLang="en-US" smtClean="0"/>
               <a:t>2026-06-26</a:t>
             </a:fld>
@@ -1409,7 +1409,7 @@
           <p:cNvPr id="6" name="바닥글 개체 틀 5">
             <a:extLst>
               <a:ext uri="{FF2B5EF4-FFF2-40B4-BE49-F238E27FC236}">
-                <a16:creationId xmlns:a16="http://schemas.microsoft.com/office/drawing/2014/main" id="{10A6A0CA-F081-90E0-09F5-090A323130B4}"/>
+                <a16:creationId xmlns:a16="http://schemas.microsoft.com/office/drawing/2014/main" id="{7D2E1783-2D4A-C62D-C28E-E964C4C08B85}"/>
               </a:ext>
             </a:extLst>
           </p:cNvPr>
@@ -1434,7 +1434,7 @@
           <p:cNvPr id="7" name="슬라이드 번호 개체 틀 6">
             <a:extLst>
               <a:ext uri="{FF2B5EF4-FFF2-40B4-BE49-F238E27FC236}">
-                <a16:creationId xmlns:a16="http://schemas.microsoft.com/office/drawing/2014/main" id="{5923EA69-28FD-6F06-D4B3-FFC04E2399DA}"/>
+                <a16:creationId xmlns:a16="http://schemas.microsoft.com/office/drawing/2014/main" id="{8751FCBD-39F1-8B7E-E773-2D8F2B3E68F9}"/>
               </a:ext>
             </a:extLst>
           </p:cNvPr>
@@ -1450,7 +1450,7 @@
           <a:bodyPr/>
           <a:lstStyle/>
           <a:p>
-            <a:fld id="{E324F0D5-952A-40FC-82E6-C1B079B3D970}" type="slidenum">
+            <a:fld id="{C63C1638-AE85-4F87-8B18-1FB7979D06F4}" type="slidenum">
               <a:rPr lang="ko-KR" altLang="en-US" smtClean="0"/>
               <a:t>‹#›</a:t>
             </a:fld>
@@ -1461,7 +1461,7 @@
     </p:spTree>
     <p:extLst>
       <p:ext uri="{BB962C8B-B14F-4D97-AF65-F5344CB8AC3E}">
-        <p14:creationId xmlns:p14="http://schemas.microsoft.com/office/powerpoint/2010/main" val="383161739"/>
+        <p14:creationId xmlns:p14="http://schemas.microsoft.com/office/powerpoint/2010/main" val="4230284177"/>
       </p:ext>
     </p:extLst>
   </p:cSld>
@@ -1493,7 +1493,7 @@
           <p:cNvPr id="2" name="제목 1">
             <a:extLst>
               <a:ext uri="{FF2B5EF4-FFF2-40B4-BE49-F238E27FC236}">
-                <a16:creationId xmlns:a16="http://schemas.microsoft.com/office/drawing/2014/main" id="{A5E01BC1-8E8E-F671-7726-ECFC032BB200}"/>
+                <a16:creationId xmlns:a16="http://schemas.microsoft.com/office/drawing/2014/main" id="{4DCEF744-89DF-C3FE-6155-819F80B30277}"/>
               </a:ext>
             </a:extLst>
           </p:cNvPr>
@@ -1526,7 +1526,7 @@
           <p:cNvPr id="3" name="텍스트 개체 틀 2">
             <a:extLst>
               <a:ext uri="{FF2B5EF4-FFF2-40B4-BE49-F238E27FC236}">
-                <a16:creationId xmlns:a16="http://schemas.microsoft.com/office/drawing/2014/main" id="{81AED513-0C39-9DB6-6033-1CBB101273DD}"/>
+                <a16:creationId xmlns:a16="http://schemas.microsoft.com/office/drawing/2014/main" id="{6DAED258-49D8-B6C2-2C76-94419841224D}"/>
               </a:ext>
             </a:extLst>
           </p:cNvPr>
@@ -1597,7 +1597,7 @@
           <p:cNvPr id="4" name="내용 개체 틀 3">
             <a:extLst>
               <a:ext uri="{FF2B5EF4-FFF2-40B4-BE49-F238E27FC236}">
-                <a16:creationId xmlns:a16="http://schemas.microsoft.com/office/drawing/2014/main" id="{6647106F-62FE-A2DC-91FC-595AA2E48174}"/>
+                <a16:creationId xmlns:a16="http://schemas.microsoft.com/office/drawing/2014/main" id="{0AB6B233-5C4E-1FC1-1E55-3BE73A9CBEE1}"/>
               </a:ext>
             </a:extLst>
           </p:cNvPr>
@@ -1659,7 +1659,7 @@
           <p:cNvPr id="5" name="텍스트 개체 틀 4">
             <a:extLst>
               <a:ext uri="{FF2B5EF4-FFF2-40B4-BE49-F238E27FC236}">
-                <a16:creationId xmlns:a16="http://schemas.microsoft.com/office/drawing/2014/main" id="{F0377B47-D327-2660-5ED3-9FEAE5E690D9}"/>
+                <a16:creationId xmlns:a16="http://schemas.microsoft.com/office/drawing/2014/main" id="{6AF9C097-882C-398E-6121-7D106D217BD7}"/>
               </a:ext>
             </a:extLst>
           </p:cNvPr>
@@ -1730,7 +1730,7 @@
           <p:cNvPr id="6" name="내용 개체 틀 5">
             <a:extLst>
               <a:ext uri="{FF2B5EF4-FFF2-40B4-BE49-F238E27FC236}">
-                <a16:creationId xmlns:a16="http://schemas.microsoft.com/office/drawing/2014/main" id="{8BD88D41-2024-7479-DD82-62F140771A26}"/>
+                <a16:creationId xmlns:a16="http://schemas.microsoft.com/office/drawing/2014/main" id="{A5FA1396-22A6-546B-B24C-59F9240C8A54}"/>
               </a:ext>
             </a:extLst>
           </p:cNvPr>
@@ -1792,7 +1792,7 @@
           <p:cNvPr id="7" name="날짜 개체 틀 6">
             <a:extLst>
               <a:ext uri="{FF2B5EF4-FFF2-40B4-BE49-F238E27FC236}">
-                <a16:creationId xmlns:a16="http://schemas.microsoft.com/office/drawing/2014/main" id="{9D3C6ED4-C766-4A43-9710-7347416473BE}"/>
+                <a16:creationId xmlns:a16="http://schemas.microsoft.com/office/drawing/2014/main" id="{B91FC4FB-4BB0-E805-7525-491E28789BFE}"/>
               </a:ext>
             </a:extLst>
           </p:cNvPr>
@@ -1808,7 +1808,7 @@
           <a:bodyPr/>
           <a:lstStyle/>
           <a:p>
-            <a:fld id="{604A3960-FD57-49B9-A34E-DAF05E1A9655}" type="datetimeFigureOut">
+            <a:fld id="{1C3EDC87-7F81-476D-B1B4-92845AA6C67D}" type="datetimeFigureOut">
               <a:rPr lang="ko-KR" altLang="en-US" smtClean="0"/>
               <a:t>2026-06-26</a:t>
             </a:fld>
@@ -1821,7 +1821,7 @@
           <p:cNvPr id="8" name="바닥글 개체 틀 7">
             <a:extLst>
               <a:ext uri="{FF2B5EF4-FFF2-40B4-BE49-F238E27FC236}">
-                <a16:creationId xmlns:a16="http://schemas.microsoft.com/office/drawing/2014/main" id="{26F8A16E-C878-910B-C3E7-35AF65E20A5B}"/>
+                <a16:creationId xmlns:a16="http://schemas.microsoft.com/office/drawing/2014/main" id="{ADA1D062-084A-7A70-A280-C1301E72B3EF}"/>
               </a:ext>
             </a:extLst>
           </p:cNvPr>
@@ -1846,7 +1846,7 @@
           <p:cNvPr id="9" name="슬라이드 번호 개체 틀 8">
             <a:extLst>
               <a:ext uri="{FF2B5EF4-FFF2-40B4-BE49-F238E27FC236}">
-                <a16:creationId xmlns:a16="http://schemas.microsoft.com/office/drawing/2014/main" id="{F076784F-C83E-6AAF-F02A-4A9377837EF6}"/>
+                <a16:creationId xmlns:a16="http://schemas.microsoft.com/office/drawing/2014/main" id="{4653145D-BF4B-814A-9F1F-E8C7780B86B9}"/>
               </a:ext>
             </a:extLst>
           </p:cNvPr>
@@ -1862,7 +1862,7 @@
           <a:bodyPr/>
           <a:lstStyle/>
           <a:p>
-            <a:fld id="{E324F0D5-952A-40FC-82E6-C1B079B3D970}" type="slidenum">
+            <a:fld id="{C63C1638-AE85-4F87-8B18-1FB7979D06F4}" type="slidenum">
               <a:rPr lang="ko-KR" altLang="en-US" smtClean="0"/>
               <a:t>‹#›</a:t>
             </a:fld>
@@ -1873,7 +1873,7 @@
     </p:spTree>
     <p:extLst>
       <p:ext uri="{BB962C8B-B14F-4D97-AF65-F5344CB8AC3E}">
-        <p14:creationId xmlns:p14="http://schemas.microsoft.com/office/powerpoint/2010/main" val="2278125690"/>
+        <p14:creationId xmlns:p14="http://schemas.microsoft.com/office/powerpoint/2010/main" val="483055970"/>
       </p:ext>
     </p:extLst>
   </p:cSld>
@@ -1905,7 +1905,7 @@
           <p:cNvPr id="2" name="제목 1">
             <a:extLst>
               <a:ext uri="{FF2B5EF4-FFF2-40B4-BE49-F238E27FC236}">
-                <a16:creationId xmlns:a16="http://schemas.microsoft.com/office/drawing/2014/main" id="{DBCA339E-9580-0DE6-B246-6CFCE28725C2}"/>
+                <a16:creationId xmlns:a16="http://schemas.microsoft.com/office/drawing/2014/main" id="{1E1991F5-1FC7-FC81-D9F1-D20679D81087}"/>
               </a:ext>
             </a:extLst>
           </p:cNvPr>
@@ -1933,7 +1933,7 @@
           <p:cNvPr id="3" name="날짜 개체 틀 2">
             <a:extLst>
               <a:ext uri="{FF2B5EF4-FFF2-40B4-BE49-F238E27FC236}">
-                <a16:creationId xmlns:a16="http://schemas.microsoft.com/office/drawing/2014/main" id="{89D0F4E0-8CD9-5C80-1189-42A07DACC1EB}"/>
+                <a16:creationId xmlns:a16="http://schemas.microsoft.com/office/drawing/2014/main" id="{F162702C-9111-C8DE-217B-682744D665C3}"/>
               </a:ext>
             </a:extLst>
           </p:cNvPr>
@@ -1949,7 +1949,7 @@
           <a:bodyPr/>
           <a:lstStyle/>
           <a:p>
-            <a:fld id="{604A3960-FD57-49B9-A34E-DAF05E1A9655}" type="datetimeFigureOut">
+            <a:fld id="{1C3EDC87-7F81-476D-B1B4-92845AA6C67D}" type="datetimeFigureOut">
               <a:rPr lang="ko-KR" altLang="en-US" smtClean="0"/>
               <a:t>2026-06-26</a:t>
             </a:fld>
@@ -1962,7 +1962,7 @@
           <p:cNvPr id="4" name="바닥글 개체 틀 3">
             <a:extLst>
               <a:ext uri="{FF2B5EF4-FFF2-40B4-BE49-F238E27FC236}">
-                <a16:creationId xmlns:a16="http://schemas.microsoft.com/office/drawing/2014/main" id="{A1AB9669-548B-904A-9B51-794DACE2CA72}"/>
+                <a16:creationId xmlns:a16="http://schemas.microsoft.com/office/drawing/2014/main" id="{0D716428-9978-8469-36FB-B20A64D3741B}"/>
               </a:ext>
             </a:extLst>
           </p:cNvPr>
@@ -1987,7 +1987,7 @@
           <p:cNvPr id="5" name="슬라이드 번호 개체 틀 4">
             <a:extLst>
               <a:ext uri="{FF2B5EF4-FFF2-40B4-BE49-F238E27FC236}">
-                <a16:creationId xmlns:a16="http://schemas.microsoft.com/office/drawing/2014/main" id="{99B3DA61-4A1A-F871-A880-6DEAD48E36F7}"/>
+                <a16:creationId xmlns:a16="http://schemas.microsoft.com/office/drawing/2014/main" id="{22B9E45E-6C4D-0ED7-755C-EF7E245836A2}"/>
               </a:ext>
             </a:extLst>
           </p:cNvPr>
@@ -2003,7 +2003,7 @@
           <a:bodyPr/>
           <a:lstStyle/>
           <a:p>
-            <a:fld id="{E324F0D5-952A-40FC-82E6-C1B079B3D970}" type="slidenum">
+            <a:fld id="{C63C1638-AE85-4F87-8B18-1FB7979D06F4}" type="slidenum">
               <a:rPr lang="ko-KR" altLang="en-US" smtClean="0"/>
               <a:t>‹#›</a:t>
             </a:fld>
@@ -2014,7 +2014,7 @@
     </p:spTree>
     <p:extLst>
       <p:ext uri="{BB962C8B-B14F-4D97-AF65-F5344CB8AC3E}">
-        <p14:creationId xmlns:p14="http://schemas.microsoft.com/office/powerpoint/2010/main" val="13178913"/>
+        <p14:creationId xmlns:p14="http://schemas.microsoft.com/office/powerpoint/2010/main" val="1559179943"/>
       </p:ext>
     </p:extLst>
   </p:cSld>
@@ -2046,7 +2046,7 @@
           <p:cNvPr id="2" name="날짜 개체 틀 1">
             <a:extLst>
               <a:ext uri="{FF2B5EF4-FFF2-40B4-BE49-F238E27FC236}">
-                <a16:creationId xmlns:a16="http://schemas.microsoft.com/office/drawing/2014/main" id="{F61C4D8C-6A75-A074-E099-2460520FB66B}"/>
+                <a16:creationId xmlns:a16="http://schemas.microsoft.com/office/drawing/2014/main" id="{24A4384C-BB74-42BC-3A01-2C375BD635F0}"/>
               </a:ext>
             </a:extLst>
           </p:cNvPr>
@@ -2062,7 +2062,7 @@
           <a:bodyPr/>
           <a:lstStyle/>
           <a:p>
-            <a:fld id="{604A3960-FD57-49B9-A34E-DAF05E1A9655}" type="datetimeFigureOut">
+            <a:fld id="{1C3EDC87-7F81-476D-B1B4-92845AA6C67D}" type="datetimeFigureOut">
               <a:rPr lang="ko-KR" altLang="en-US" smtClean="0"/>
               <a:t>2026-06-26</a:t>
             </a:fld>
@@ -2075,7 +2075,7 @@
           <p:cNvPr id="3" name="바닥글 개체 틀 2">
             <a:extLst>
               <a:ext uri="{FF2B5EF4-FFF2-40B4-BE49-F238E27FC236}">
-                <a16:creationId xmlns:a16="http://schemas.microsoft.com/office/drawing/2014/main" id="{0049B44F-5805-0462-3366-07F60C09B2BE}"/>
+                <a16:creationId xmlns:a16="http://schemas.microsoft.com/office/drawing/2014/main" id="{F352B25B-2E8F-7B77-D5F4-90CD7626A742}"/>
               </a:ext>
             </a:extLst>
           </p:cNvPr>
@@ -2100,7 +2100,7 @@
           <p:cNvPr id="4" name="슬라이드 번호 개체 틀 3">
             <a:extLst>
               <a:ext uri="{FF2B5EF4-FFF2-40B4-BE49-F238E27FC236}">
-                <a16:creationId xmlns:a16="http://schemas.microsoft.com/office/drawing/2014/main" id="{5F712B00-5EE5-4A35-94CC-911998BF93EE}"/>
+                <a16:creationId xmlns:a16="http://schemas.microsoft.com/office/drawing/2014/main" id="{147B3C50-E5FA-3A17-2D77-0871252A7731}"/>
               </a:ext>
             </a:extLst>
           </p:cNvPr>
@@ -2116,7 +2116,7 @@
           <a:bodyPr/>
           <a:lstStyle/>
           <a:p>
-            <a:fld id="{E324F0D5-952A-40FC-82E6-C1B079B3D970}" type="slidenum">
+            <a:fld id="{C63C1638-AE85-4F87-8B18-1FB7979D06F4}" type="slidenum">
               <a:rPr lang="ko-KR" altLang="en-US" smtClean="0"/>
               <a:t>‹#›</a:t>
             </a:fld>
@@ -2127,7 +2127,7 @@
     </p:spTree>
     <p:extLst>
       <p:ext uri="{BB962C8B-B14F-4D97-AF65-F5344CB8AC3E}">
-        <p14:creationId xmlns:p14="http://schemas.microsoft.com/office/powerpoint/2010/main" val="1689369212"/>
+        <p14:creationId xmlns:p14="http://schemas.microsoft.com/office/powerpoint/2010/main" val="1122101607"/>
       </p:ext>
     </p:extLst>
   </p:cSld>
@@ -2159,7 +2159,7 @@
           <p:cNvPr id="2" name="제목 1">
             <a:extLst>
               <a:ext uri="{FF2B5EF4-FFF2-40B4-BE49-F238E27FC236}">
-                <a16:creationId xmlns:a16="http://schemas.microsoft.com/office/drawing/2014/main" id="{63A00588-1666-1FC2-ACA0-2254F8C8E2A6}"/>
+                <a16:creationId xmlns:a16="http://schemas.microsoft.com/office/drawing/2014/main" id="{D571DB60-053A-B609-1416-D5FA58BEB620}"/>
               </a:ext>
             </a:extLst>
           </p:cNvPr>
@@ -2196,7 +2196,7 @@
           <p:cNvPr id="3" name="내용 개체 틀 2">
             <a:extLst>
               <a:ext uri="{FF2B5EF4-FFF2-40B4-BE49-F238E27FC236}">
-                <a16:creationId xmlns:a16="http://schemas.microsoft.com/office/drawing/2014/main" id="{F6F254A3-DD4E-75D6-2469-B7134B112549}"/>
+                <a16:creationId xmlns:a16="http://schemas.microsoft.com/office/drawing/2014/main" id="{827BBB27-7B5F-6AD0-A3D3-CCC266D53A4E}"/>
               </a:ext>
             </a:extLst>
           </p:cNvPr>
@@ -2286,7 +2286,7 @@
           <p:cNvPr id="4" name="텍스트 개체 틀 3">
             <a:extLst>
               <a:ext uri="{FF2B5EF4-FFF2-40B4-BE49-F238E27FC236}">
-                <a16:creationId xmlns:a16="http://schemas.microsoft.com/office/drawing/2014/main" id="{D4DD19ED-1443-CE01-BB53-85FCA966F884}"/>
+                <a16:creationId xmlns:a16="http://schemas.microsoft.com/office/drawing/2014/main" id="{DD7D35D0-63A4-694C-23E6-C5486DC3C253}"/>
               </a:ext>
             </a:extLst>
           </p:cNvPr>
@@ -2357,7 +2357,7 @@
           <p:cNvPr id="5" name="날짜 개체 틀 4">
             <a:extLst>
               <a:ext uri="{FF2B5EF4-FFF2-40B4-BE49-F238E27FC236}">
-                <a16:creationId xmlns:a16="http://schemas.microsoft.com/office/drawing/2014/main" id="{1BA52A17-F3B6-8944-91BD-FED79EF67A23}"/>
+                <a16:creationId xmlns:a16="http://schemas.microsoft.com/office/drawing/2014/main" id="{8C1C7F5B-D4FC-470A-A27E-4C857231CF6D}"/>
               </a:ext>
             </a:extLst>
           </p:cNvPr>
@@ -2373,7 +2373,7 @@
           <a:bodyPr/>
           <a:lstStyle/>
           <a:p>
-            <a:fld id="{604A3960-FD57-49B9-A34E-DAF05E1A9655}" type="datetimeFigureOut">
+            <a:fld id="{1C3EDC87-7F81-476D-B1B4-92845AA6C67D}" type="datetimeFigureOut">
               <a:rPr lang="ko-KR" altLang="en-US" smtClean="0"/>
               <a:t>2026-06-26</a:t>
             </a:fld>
@@ -2386,7 +2386,7 @@
           <p:cNvPr id="6" name="바닥글 개체 틀 5">
             <a:extLst>
               <a:ext uri="{FF2B5EF4-FFF2-40B4-BE49-F238E27FC236}">
-                <a16:creationId xmlns:a16="http://schemas.microsoft.com/office/drawing/2014/main" id="{2AEDE052-8DBB-902C-904C-3336CB751AEC}"/>
+                <a16:creationId xmlns:a16="http://schemas.microsoft.com/office/drawing/2014/main" id="{D207C214-B482-3C8B-E9F0-7ACED0636873}"/>
               </a:ext>
             </a:extLst>
           </p:cNvPr>
@@ -2411,7 +2411,7 @@
           <p:cNvPr id="7" name="슬라이드 번호 개체 틀 6">
             <a:extLst>
               <a:ext uri="{FF2B5EF4-FFF2-40B4-BE49-F238E27FC236}">
-                <a16:creationId xmlns:a16="http://schemas.microsoft.com/office/drawing/2014/main" id="{535E97DB-9BE4-78D7-1B3E-3A2BD8EAAB6D}"/>
+                <a16:creationId xmlns:a16="http://schemas.microsoft.com/office/drawing/2014/main" id="{9F2381CD-8C56-75A7-85B1-2AD6D4F9FADC}"/>
               </a:ext>
             </a:extLst>
           </p:cNvPr>
@@ -2427,7 +2427,7 @@
           <a:bodyPr/>
           <a:lstStyle/>
           <a:p>
-            <a:fld id="{E324F0D5-952A-40FC-82E6-C1B079B3D970}" type="slidenum">
+            <a:fld id="{C63C1638-AE85-4F87-8B18-1FB7979D06F4}" type="slidenum">
               <a:rPr lang="ko-KR" altLang="en-US" smtClean="0"/>
               <a:t>‹#›</a:t>
             </a:fld>
@@ -2438,7 +2438,7 @@
     </p:spTree>
     <p:extLst>
       <p:ext uri="{BB962C8B-B14F-4D97-AF65-F5344CB8AC3E}">
-        <p14:creationId xmlns:p14="http://schemas.microsoft.com/office/powerpoint/2010/main" val="99321174"/>
+        <p14:creationId xmlns:p14="http://schemas.microsoft.com/office/powerpoint/2010/main" val="620227161"/>
       </p:ext>
     </p:extLst>
   </p:cSld>
@@ -2470,7 +2470,7 @@
           <p:cNvPr id="2" name="제목 1">
             <a:extLst>
               <a:ext uri="{FF2B5EF4-FFF2-40B4-BE49-F238E27FC236}">
-                <a16:creationId xmlns:a16="http://schemas.microsoft.com/office/drawing/2014/main" id="{B96EA189-1449-477C-B420-16FB0B906006}"/>
+                <a16:creationId xmlns:a16="http://schemas.microsoft.com/office/drawing/2014/main" id="{8E9C9A9A-6D0A-34AA-6A89-55E33E0846A7}"/>
               </a:ext>
             </a:extLst>
           </p:cNvPr>
@@ -2507,7 +2507,7 @@
           <p:cNvPr id="3" name="그림 개체 틀 2">
             <a:extLst>
               <a:ext uri="{FF2B5EF4-FFF2-40B4-BE49-F238E27FC236}">
-                <a16:creationId xmlns:a16="http://schemas.microsoft.com/office/drawing/2014/main" id="{7AAF323A-28B4-AE77-7BA9-EBA639051335}"/>
+                <a16:creationId xmlns:a16="http://schemas.microsoft.com/office/drawing/2014/main" id="{01ED29E3-F45C-1E44-C1BB-10FC21267301}"/>
               </a:ext>
             </a:extLst>
           </p:cNvPr>
@@ -2574,7 +2574,7 @@
           <p:cNvPr id="4" name="텍스트 개체 틀 3">
             <a:extLst>
               <a:ext uri="{FF2B5EF4-FFF2-40B4-BE49-F238E27FC236}">
-                <a16:creationId xmlns:a16="http://schemas.microsoft.com/office/drawing/2014/main" id="{AABC55E6-31E6-2705-9B3B-20BA234EB7F3}"/>
+                <a16:creationId xmlns:a16="http://schemas.microsoft.com/office/drawing/2014/main" id="{B43FA882-5335-9828-8513-0F101953CA25}"/>
               </a:ext>
             </a:extLst>
           </p:cNvPr>
@@ -2645,7 +2645,7 @@
           <p:cNvPr id="5" name="날짜 개체 틀 4">
             <a:extLst>
               <a:ext uri="{FF2B5EF4-FFF2-40B4-BE49-F238E27FC236}">
-                <a16:creationId xmlns:a16="http://schemas.microsoft.com/office/drawing/2014/main" id="{EDE83520-548E-5FAB-13E0-4AF6B6F63DAB}"/>
+                <a16:creationId xmlns:a16="http://schemas.microsoft.com/office/drawing/2014/main" id="{AD96F3B3-4F2F-8464-0650-F3217C82B6F6}"/>
               </a:ext>
             </a:extLst>
           </p:cNvPr>
@@ -2661,7 +2661,7 @@
           <a:bodyPr/>
           <a:lstStyle/>
           <a:p>
-            <a:fld id="{604A3960-FD57-49B9-A34E-DAF05E1A9655}" type="datetimeFigureOut">
+            <a:fld id="{1C3EDC87-7F81-476D-B1B4-92845AA6C67D}" type="datetimeFigureOut">
               <a:rPr lang="ko-KR" altLang="en-US" smtClean="0"/>
               <a:t>2026-06-26</a:t>
             </a:fld>
@@ -2674,7 +2674,7 @@
           <p:cNvPr id="6" name="바닥글 개체 틀 5">
             <a:extLst>
               <a:ext uri="{FF2B5EF4-FFF2-40B4-BE49-F238E27FC236}">
-                <a16:creationId xmlns:a16="http://schemas.microsoft.com/office/drawing/2014/main" id="{1345A57F-4E01-3235-81F6-B6E0361F3972}"/>
+                <a16:creationId xmlns:a16="http://schemas.microsoft.com/office/drawing/2014/main" id="{1D449928-4863-50DD-19E9-758F46E4EADA}"/>
               </a:ext>
             </a:extLst>
           </p:cNvPr>
@@ -2699,7 +2699,7 @@
           <p:cNvPr id="7" name="슬라이드 번호 개체 틀 6">
             <a:extLst>
               <a:ext uri="{FF2B5EF4-FFF2-40B4-BE49-F238E27FC236}">
-                <a16:creationId xmlns:a16="http://schemas.microsoft.com/office/drawing/2014/main" id="{0375CCC3-0C84-6F43-5E28-17D235F15ED2}"/>
+                <a16:creationId xmlns:a16="http://schemas.microsoft.com/office/drawing/2014/main" id="{2A93FBC0-7207-EC00-4F3D-A54DF764B55F}"/>
               </a:ext>
             </a:extLst>
           </p:cNvPr>
@@ -2715,7 +2715,7 @@
           <a:bodyPr/>
           <a:lstStyle/>
           <a:p>
-            <a:fld id="{E324F0D5-952A-40FC-82E6-C1B079B3D970}" type="slidenum">
+            <a:fld id="{C63C1638-AE85-4F87-8B18-1FB7979D06F4}" type="slidenum">
               <a:rPr lang="ko-KR" altLang="en-US" smtClean="0"/>
               <a:t>‹#›</a:t>
             </a:fld>
@@ -2726,7 +2726,7 @@
     </p:spTree>
     <p:extLst>
       <p:ext uri="{BB962C8B-B14F-4D97-AF65-F5344CB8AC3E}">
-        <p14:creationId xmlns:p14="http://schemas.microsoft.com/office/powerpoint/2010/main" val="468323883"/>
+        <p14:creationId xmlns:p14="http://schemas.microsoft.com/office/powerpoint/2010/main" val="3160244819"/>
       </p:ext>
     </p:extLst>
   </p:cSld>
@@ -2763,7 +2763,7 @@
           <p:cNvPr id="2" name="제목 개체 틀 1">
             <a:extLst>
               <a:ext uri="{FF2B5EF4-FFF2-40B4-BE49-F238E27FC236}">
-                <a16:creationId xmlns:a16="http://schemas.microsoft.com/office/drawing/2014/main" id="{921791E5-85F9-2109-3346-44167C8EB3B3}"/>
+                <a16:creationId xmlns:a16="http://schemas.microsoft.com/office/drawing/2014/main" id="{AFA28C87-5F0A-637B-7B67-2C66CEB8C1B0}"/>
               </a:ext>
             </a:extLst>
           </p:cNvPr>
@@ -2801,7 +2801,7 @@
           <p:cNvPr id="3" name="텍스트 개체 틀 2">
             <a:extLst>
               <a:ext uri="{FF2B5EF4-FFF2-40B4-BE49-F238E27FC236}">
-                <a16:creationId xmlns:a16="http://schemas.microsoft.com/office/drawing/2014/main" id="{3FFD0A2A-BE84-AC56-6B91-6FE5E2C666FA}"/>
+                <a16:creationId xmlns:a16="http://schemas.microsoft.com/office/drawing/2014/main" id="{DC9F9CC7-CB92-EEE6-9EAC-CD5C80E65583}"/>
               </a:ext>
             </a:extLst>
           </p:cNvPr>
@@ -2868,7 +2868,7 @@
           <p:cNvPr id="4" name="날짜 개체 틀 3">
             <a:extLst>
               <a:ext uri="{FF2B5EF4-FFF2-40B4-BE49-F238E27FC236}">
-                <a16:creationId xmlns:a16="http://schemas.microsoft.com/office/drawing/2014/main" id="{67545086-5B80-DBDF-291C-58F9F6D35928}"/>
+                <a16:creationId xmlns:a16="http://schemas.microsoft.com/office/drawing/2014/main" id="{BF97BF73-D681-A007-F31E-E10E22504656}"/>
               </a:ext>
             </a:extLst>
           </p:cNvPr>
@@ -2902,7 +2902,7 @@
             </a:lvl1pPr>
           </a:lstStyle>
           <a:p>
-            <a:fld id="{604A3960-FD57-49B9-A34E-DAF05E1A9655}" type="datetimeFigureOut">
+            <a:fld id="{1C3EDC87-7F81-476D-B1B4-92845AA6C67D}" type="datetimeFigureOut">
               <a:rPr lang="ko-KR" altLang="en-US" smtClean="0"/>
               <a:t>2026-06-26</a:t>
             </a:fld>
@@ -2915,7 +2915,7 @@
           <p:cNvPr id="5" name="바닥글 개체 틀 4">
             <a:extLst>
               <a:ext uri="{FF2B5EF4-FFF2-40B4-BE49-F238E27FC236}">
-                <a16:creationId xmlns:a16="http://schemas.microsoft.com/office/drawing/2014/main" id="{F33C5CE0-31B7-51D3-3523-937B8983934D}"/>
+                <a16:creationId xmlns:a16="http://schemas.microsoft.com/office/drawing/2014/main" id="{BBE93B1F-6091-8154-C513-7ED0A436D56F}"/>
               </a:ext>
             </a:extLst>
           </p:cNvPr>
@@ -2958,7 +2958,7 @@
           <p:cNvPr id="6" name="슬라이드 번호 개체 틀 5">
             <a:extLst>
               <a:ext uri="{FF2B5EF4-FFF2-40B4-BE49-F238E27FC236}">
-                <a16:creationId xmlns:a16="http://schemas.microsoft.com/office/drawing/2014/main" id="{7CE8CB4A-8A47-AD8C-BC03-F8C357C39D2F}"/>
+                <a16:creationId xmlns:a16="http://schemas.microsoft.com/office/drawing/2014/main" id="{9AC697D8-6217-85F0-963C-9D96F978E286}"/>
               </a:ext>
             </a:extLst>
           </p:cNvPr>
@@ -2992,7 +2992,7 @@
             </a:lvl1pPr>
           </a:lstStyle>
           <a:p>
-            <a:fld id="{E324F0D5-952A-40FC-82E6-C1B079B3D970}" type="slidenum">
+            <a:fld id="{C63C1638-AE85-4F87-8B18-1FB7979D06F4}" type="slidenum">
               <a:rPr lang="ko-KR" altLang="en-US" smtClean="0"/>
               <a:t>‹#›</a:t>
             </a:fld>
@@ -3003,7 +3003,7 @@
     </p:spTree>
     <p:extLst>
       <p:ext uri="{BB962C8B-B14F-4D97-AF65-F5344CB8AC3E}">
-        <p14:creationId xmlns:p14="http://schemas.microsoft.com/office/powerpoint/2010/main" val="258588570"/>
+        <p14:creationId xmlns:p14="http://schemas.microsoft.com/office/powerpoint/2010/main" val="1718221605"/>
       </p:ext>
     </p:extLst>
   </p:cSld>
@@ -3326,7 +3326,7 @@
           <p:cNvPr id="3" name="그림 2">
             <a:extLst>
               <a:ext uri="{FF2B5EF4-FFF2-40B4-BE49-F238E27FC236}">
-                <a16:creationId xmlns:a16="http://schemas.microsoft.com/office/drawing/2014/main" id="{CB94D6B1-370F-A6D7-F34C-E10B430FE0E7}"/>
+                <a16:creationId xmlns:a16="http://schemas.microsoft.com/office/drawing/2014/main" id="{1CF9B32C-D01A-ADB8-61E1-66C0C9AE82B1}"/>
               </a:ext>
             </a:extLst>
           </p:cNvPr>
@@ -3360,7 +3360,7 @@
     </p:spTree>
     <p:extLst>
       <p:ext uri="{BB962C8B-B14F-4D97-AF65-F5344CB8AC3E}">
-        <p14:creationId xmlns:p14="http://schemas.microsoft.com/office/powerpoint/2010/main" val="244498691"/>
+        <p14:creationId xmlns:p14="http://schemas.microsoft.com/office/powerpoint/2010/main" val="4217506458"/>
       </p:ext>
     </p:extLst>
   </p:cSld>
